--- a/dist/초2/수학/수와계산/초2_수학_수와계산_02_네자리수_학생용.pptx
+++ b/dist/초2/수학/수와계산/초2_수학_수와계산_02_네자리수_학생용.pptx
@@ -121,13 +121,13 @@
   <p:extLst>
     <p:ext uri="{521415D9-36F7-43E2-AB2F-B90AF26B5E84}">
       <p14:sectionLst xmlns:p14="http://schemas.microsoft.com/office/powerpoint/2010/main">
-        <p14:section name="도입" id="{e3463953-b710-df7f-7b02-844bdc6ef07e}">
+        <p14:section name="도입" id="{ea6c10d2-900a-e2a9-9d75-b6acc9606226}">
           <p14:sldIdLst>
             <p14:sldId id="256"/>
             <p14:sldId id="257"/>
           </p14:sldIdLst>
         </p14:section>
-        <p14:section name="개념" id="{17367d59-ab63-d0cc-994f-2407d4ea56d7}">
+        <p14:section name="개념" id="{2dda45f5-b3bd-8601-67ba-78297e37f2e2}">
           <p14:sldIdLst>
             <p14:sldId id="258"/>
             <p14:sldId id="259"/>
@@ -137,31 +137,31 @@
             <p14:sldId id="264"/>
           </p14:sldIdLst>
         </p14:section>
-        <p14:section name="연습" id="{293be03f-6e8a-1408-6b31-da8e23bb435f}">
+        <p14:section name="연습" id="{c9748f54-f22a-9e75-d960-90e51d425bae}">
           <p14:sldIdLst>
             <p14:sldId id="262"/>
             <p14:sldId id="265"/>
             <p14:sldId id="266"/>
           </p14:sldIdLst>
         </p14:section>
-        <p14:section name="개념" id="{d05450a1-05bd-9140-a21d-0448160e4dbc}">
+        <p14:section name="개념" id="{0690b07b-22e5-d73b-9821-c112fc04bc7d}">
           <p14:sldIdLst/>
         </p14:section>
-        <p14:section name="연습" id="{8ac383ff-40ae-2d49-c69a-373821d3a795}">
+        <p14:section name="연습" id="{2d14d571-959c-7bbb-f973-335122ca405b}">
           <p14:sldIdLst/>
         </p14:section>
-        <p14:section name="확인" id="{d3909332-7218-9e96-da69-9ff77ef107d9}">
+        <p14:section name="확인" id="{940c152f-7c3d-ee27-423a-200d1608e159}">
           <p14:sldIdLst>
             <p14:sldId id="267"/>
             <p14:sldId id="268"/>
           </p14:sldIdLst>
         </p14:section>
-        <p14:section name="정리" id="{2429f325-f929-ee9c-bfea-807649410c09}">
+        <p14:section name="정리" id="{e3f3a8cd-bf48-a27f-6d16-0d6ad7579871}">
           <p14:sldIdLst>
             <p14:sldId id="269"/>
           </p14:sldIdLst>
         </p14:section>
-        <p14:section name="보충" id="{9db73b61-d2be-4b37-c93c-6cc655b19902}">
+        <p14:section name="보충" id="{14b2633d-90df-bf72-03d4-dcca9f5a33bd}">
           <p14:sldIdLst>
             <p14:sldId id="270"/>
           </p14:sldIdLst>
@@ -2955,7 +2955,7 @@
           </p:nvPr>
         </p:nvGraphicFramePr>
         <p:xfrm>
-          <a:off x="7680960" y="1452880"/>
+          <a:off x="7680960" y="1473200"/>
           <a:ext cx="3931920" cy="914400"/>
         </p:xfrm>
         <a:graphic>
@@ -2968,7 +2968,7 @@
                 <a:gridCol w="982980"/>
                 <a:gridCol w="982980"/>
               </a:tblGrid>
-              <a:tr h="650240">
+              <a:tr h="629920">
                 <a:tc>
                   <a:txBody>
                     <a:bodyPr/>
@@ -3242,7 +3242,7 @@
                   </a:tcPr>
                 </a:tc>
               </a:tr>
-              <a:tr h="650240">
+              <a:tr h="629920">
                 <a:tc>
                   <a:txBody>
                     <a:bodyPr/>
@@ -8247,7 +8247,7 @@
           </p:nvPr>
         </p:nvGraphicFramePr>
         <p:xfrm>
-          <a:off x="6615684" y="2430780"/>
+          <a:off x="6615684" y="2455545"/>
           <a:ext cx="4663440" cy="914400"/>
         </p:xfrm>
         <a:graphic>
@@ -8259,7 +8259,7 @@
                 <a:gridCol w="1554480"/>
                 <a:gridCol w="1554480"/>
               </a:tblGrid>
-              <a:tr h="528320">
+              <a:tr h="511810">
                 <a:tc>
                   <a:txBody>
                     <a:bodyPr/>
@@ -8465,7 +8465,7 @@
                   </a:tcPr>
                 </a:tc>
               </a:tr>
-              <a:tr h="528320">
+              <a:tr h="511810">
                 <a:tc>
                   <a:txBody>
                     <a:bodyPr/>
@@ -8671,7 +8671,7 @@
                   </a:tcPr>
                 </a:tc>
               </a:tr>
-              <a:tr h="528320">
+              <a:tr h="511810">
                 <a:tc>
                   <a:txBody>
                     <a:bodyPr/>
@@ -14250,7 +14250,7 @@
           </p:nvPr>
         </p:nvGraphicFramePr>
         <p:xfrm>
-          <a:off x="2436876" y="2042160"/>
+          <a:off x="2436876" y="2089785"/>
           <a:ext cx="7315200" cy="914400"/>
         </p:xfrm>
         <a:graphic>
@@ -14262,7 +14262,7 @@
                 <a:gridCol w="2414016"/>
                 <a:gridCol w="2414016"/>
               </a:tblGrid>
-              <a:tr h="609600">
+              <a:tr h="590550">
                 <a:tc>
                   <a:txBody>
                     <a:bodyPr/>
@@ -14468,7 +14468,7 @@
                   </a:tcPr>
                 </a:tc>
               </a:tr>
-              <a:tr h="609600">
+              <a:tr h="590550">
                 <a:tc>
                   <a:txBody>
                     <a:bodyPr/>
@@ -14674,7 +14674,7 @@
                   </a:tcPr>
                 </a:tc>
               </a:tr>
-              <a:tr h="609600">
+              <a:tr h="590550">
                 <a:tc>
                   <a:txBody>
                     <a:bodyPr/>
@@ -14880,7 +14880,7 @@
                   </a:tcPr>
                 </a:tc>
               </a:tr>
-              <a:tr h="609600">
+              <a:tr h="590550">
                 <a:tc>
                   <a:txBody>
                     <a:bodyPr/>
@@ -15086,7 +15086,7 @@
                   </a:tcPr>
                 </a:tc>
               </a:tr>
-              <a:tr h="609600">
+              <a:tr h="590550">
                 <a:tc>
                   <a:txBody>
                     <a:bodyPr/>
@@ -15553,7 +15553,7 @@
           </p:nvPr>
         </p:nvGraphicFramePr>
         <p:xfrm>
-          <a:off x="2985516" y="2556002"/>
+          <a:off x="2985516" y="2580767"/>
           <a:ext cx="6217920" cy="914400"/>
         </p:xfrm>
         <a:graphic>
@@ -15566,7 +15566,7 @@
                 <a:gridCol w="1554480"/>
                 <a:gridCol w="1554480"/>
               </a:tblGrid>
-              <a:tr h="528320">
+              <a:tr h="511810">
                 <a:tc>
                   <a:txBody>
                     <a:bodyPr/>
@@ -15840,7 +15840,7 @@
                   </a:tcPr>
                 </a:tc>
               </a:tr>
-              <a:tr h="528320">
+              <a:tr h="511810">
                 <a:tc>
                   <a:txBody>
                     <a:bodyPr/>
@@ -16114,7 +16114,7 @@
                   </a:tcPr>
                 </a:tc>
               </a:tr>
-              <a:tr h="528320">
+              <a:tr h="511810">
                 <a:tc>
                   <a:txBody>
                     <a:bodyPr/>
@@ -16649,7 +16649,7 @@
           </p:nvPr>
         </p:nvGraphicFramePr>
         <p:xfrm>
-          <a:off x="2985516" y="2820162"/>
+          <a:off x="2985516" y="2836672"/>
           <a:ext cx="6217920" cy="914400"/>
         </p:xfrm>
         <a:graphic>
@@ -16662,7 +16662,7 @@
                 <a:gridCol w="1554480"/>
                 <a:gridCol w="1554480"/>
               </a:tblGrid>
-              <a:tr h="528320">
+              <a:tr h="511810">
                 <a:tc>
                   <a:txBody>
                     <a:bodyPr/>
@@ -16936,7 +16936,7 @@
                   </a:tcPr>
                 </a:tc>
               </a:tr>
-              <a:tr h="528320">
+              <a:tr h="511810">
                 <a:tc>
                   <a:txBody>
                     <a:bodyPr/>
@@ -17978,7 +17978,7 @@
           </p:nvPr>
         </p:nvGraphicFramePr>
         <p:xfrm>
-          <a:off x="1522476" y="2042160"/>
+          <a:off x="1522476" y="2089785"/>
           <a:ext cx="9144000" cy="914400"/>
         </p:xfrm>
         <a:graphic>
@@ -17989,7 +17989,7 @@
                 <a:gridCol w="2286000"/>
                 <a:gridCol w="6858000"/>
               </a:tblGrid>
-              <a:tr h="609600">
+              <a:tr h="590550">
                 <a:tc>
                   <a:txBody>
                     <a:bodyPr/>
@@ -18127,7 +18127,7 @@
                   </a:tcPr>
                 </a:tc>
               </a:tr>
-              <a:tr h="609600">
+              <a:tr h="590550">
                 <a:tc>
                   <a:txBody>
                     <a:bodyPr/>
@@ -18265,7 +18265,7 @@
                   </a:tcPr>
                 </a:tc>
               </a:tr>
-              <a:tr h="609600">
+              <a:tr h="590550">
                 <a:tc>
                   <a:txBody>
                     <a:bodyPr/>
@@ -18403,7 +18403,7 @@
                   </a:tcPr>
                 </a:tc>
               </a:tr>
-              <a:tr h="609600">
+              <a:tr h="590550">
                 <a:tc>
                   <a:txBody>
                     <a:bodyPr/>
@@ -18541,7 +18541,7 @@
                   </a:tcPr>
                 </a:tc>
               </a:tr>
-              <a:tr h="609600">
+              <a:tr h="590550">
                 <a:tc>
                   <a:txBody>
                     <a:bodyPr/>
@@ -18891,7 +18891,7 @@
               <a:buNone/>
             </a:pPr>
             <a:r>
-              <a:rPr lang="ko-KR" altLang="en-US" sz="3200" b="1" dirty="0">
+              <a:rPr lang="en-US" altLang="ko-KR" sz="3200" b="1" dirty="0">
                 <a:solidFill>
                   <a:srgbClr val="1F2937"/>
                 </a:solidFill>
@@ -18940,7 +18940,7 @@
           </p:nvPr>
         </p:nvGraphicFramePr>
         <p:xfrm>
-          <a:off x="2208276" y="2373122"/>
+          <a:off x="2208276" y="2403602"/>
           <a:ext cx="7772400" cy="914400"/>
         </p:xfrm>
         <a:graphic>
@@ -18954,7 +18954,7 @@
                 <a:gridCol w="1554480"/>
                 <a:gridCol w="1554480"/>
               </a:tblGrid>
-              <a:tr h="650240">
+              <a:tr h="629920">
                 <a:tc>
                   <a:txBody>
                     <a:bodyPr/>
@@ -19296,7 +19296,7 @@
                   </a:tcPr>
                 </a:tc>
               </a:tr>
-              <a:tr h="650240">
+              <a:tr h="629920">
                 <a:tc>
                   <a:txBody>
                     <a:bodyPr/>
@@ -19638,7 +19638,7 @@
                   </a:tcPr>
                 </a:tc>
               </a:tr>
-              <a:tr h="650240">
+              <a:tr h="629920">
                 <a:tc>
                   <a:txBody>
                     <a:bodyPr/>
